--- a/examples/10_smart_city_twin/Presentation.pptx
+++ b/examples/10_smart_city_twin/Presentation.pptx
@@ -7,10 +7,9 @@
   <p:sldIdLst>
     <p:sldId id="256" r:id="rId2"/>
     <p:sldId id="257" r:id="rId3"/>
-    <p:sldId id="258" r:id="rId4"/>
   </p:sldIdLst>
   <p:notesMasterIdLst>
-    <p:notesMasterId r:id="rId5"/>
+    <p:notesMasterId r:id="rId4"/>
   </p:notesMasterIdLst>
   <p:sldSz cx="12192000" cy="6858000"/>
   <p:notesSz cx="6858000" cy="12192000"/>
@@ -504,8 +503,8 @@
           <a:p>
             <a:r>
               <a:rPr lang="en-US" dirty="0"/>
-              <a:t>1. Hero
-note: [오프닝] 도시 안전과 재난 예방을 위한 실시간 3D 디지털 트윈 관제 체계를 보고드립니다.</a:t>
+              <a:t>Slide 1: Public Dashboard Layout
+note: 공공 스마트시티 대시보드 형태의 4분할 실시간 관제 슬라이드입니다.</a:t>
             </a:r>
             <a:endParaRPr lang="en-US" dirty="0"/>
           </a:p>
@@ -593,8 +592,7 @@
           <a:p>
             <a:r>
               <a:rPr lang="en-US" dirty="0"/>
-              <a:t>2. Big Stats
-note: [성과] 골든타임 5분 확보와 긴급 출동 시간 41% 단축을 달성했습니다.</a:t>
+              <a:t>Slide 2: Gov Infrastructure Architecture</a:t>
             </a:r>
             <a:endParaRPr lang="en-US" dirty="0"/>
           </a:p>
@@ -618,95 +616,6 @@
             <a:fld id="{F7021451-1387-4CA6-816F-3879F97B5CBC}" type="slidenum">
               <a:rPr lang="en-US"/>
               <a:t>2</a:t>
-            </a:fld>
-            <a:endParaRPr lang="en-US"/>
-          </a:p>
-        </p:txBody>
-      </p:sp>
-    </p:spTree>
-    <p:extLst>
-      <p:ext uri="{BB962C8B-B14F-4D97-AF65-F5344CB8AC3E}">
-        <p14:creationId xmlns:p14="http://schemas.microsoft.com/office/powerpoint/2010/main" val="1024086991"/>
-      </p:ext>
-    </p:extLst>
-  </p:cSld>
-  <p:clrMapOvr>
-    <a:masterClrMapping/>
-  </p:clrMapOvr>
-</p:notes>
-</file>
-
-<file path=ppt/notesSlides/notesSlide3.xml><?xml version="1.0" encoding="utf-8"?>
-<p:notes xmlns:a="http://schemas.openxmlformats.org/drawingml/2006/main" xmlns:r="http://schemas.openxmlformats.org/officeDocument/2006/relationships" xmlns:p="http://schemas.openxmlformats.org/presentationml/2006/main">
-  <p:cSld>
-    <p:spTree>
-      <p:nvGrpSpPr>
-        <p:cNvPr id="1" name=""/>
-        <p:cNvGrpSpPr/>
-        <p:nvPr/>
-      </p:nvGrpSpPr>
-      <p:grpSpPr>
-        <a:xfrm>
-          <a:off x="0" y="0"/>
-          <a:ext cx="0" cy="0"/>
-          <a:chOff x="0" y="0"/>
-          <a:chExt cx="0" cy="0"/>
-        </a:xfrm>
-      </p:grpSpPr>
-      <p:sp>
-        <p:nvSpPr>
-          <p:cNvPr id="2" name="Slide Image Placeholder 1"/>
-          <p:cNvSpPr>
-            <a:spLocks noGrp="1" noRot="1" noChangeAspect="1"/>
-          </p:cNvSpPr>
-          <p:nvPr>
-            <p:ph type="sldImg"/>
-          </p:nvPr>
-        </p:nvSpPr>
-        <p:spPr/>
-      </p:sp>
-      <p:sp>
-        <p:nvSpPr>
-          <p:cNvPr id="3" name="Notes Placeholder 2"/>
-          <p:cNvSpPr>
-            <a:spLocks noGrp="1"/>
-          </p:cNvSpPr>
-          <p:nvPr>
-            <p:ph type="body" idx="1"/>
-          </p:nvPr>
-        </p:nvSpPr>
-        <p:spPr/>
-        <p:txBody>
-          <a:bodyPr/>
-          <a:lstStyle/>
-          <a:p>
-            <a:r>
-              <a:rPr lang="en-US" dirty="0"/>
-              <a:t>3. Closing
-note: [마무리] 경청해 주셔서 감사합니다. 질문을 받겠습니다.</a:t>
-            </a:r>
-            <a:endParaRPr lang="en-US" dirty="0"/>
-          </a:p>
-        </p:txBody>
-      </p:sp>
-      <p:sp>
-        <p:nvSpPr>
-          <p:cNvPr id="4" name="Slide Number Placeholder 3"/>
-          <p:cNvSpPr>
-            <a:spLocks noGrp="1"/>
-          </p:cNvSpPr>
-          <p:nvPr>
-            <p:ph type="sldNum" sz="quarter" idx="10"/>
-          </p:nvPr>
-        </p:nvSpPr>
-        <p:spPr/>
-        <p:txBody>
-          <a:bodyPr/>
-          <a:lstStyle/>
-          <a:p>
-            <a:fld id="{F7021451-1387-4CA6-816F-3879F97B5CBC}" type="slidenum">
-              <a:rPr lang="en-US"/>
-              <a:t>3</a:t>
             </a:fld>
             <a:endParaRPr lang="en-US"/>
           </a:p>
@@ -1074,45 +983,6 @@
 <file path=ppt/slides/slide2.xml><?xml version="1.0" encoding="utf-8"?>
 <p:sld xmlns:a="http://schemas.openxmlformats.org/drawingml/2006/main" xmlns:r="http://schemas.openxmlformats.org/officeDocument/2006/relationships" xmlns:p="http://schemas.openxmlformats.org/presentationml/2006/main">
   <p:cSld name="Slide 2">
-    <p:bg>
-      <p:bgPr>
-        <a:blipFill dpi="0" rotWithShape="1">
-          <a:blip r:embed="rId1">
-            <a:lum/>
-          </a:blip>
-          <a:srcRect/>
-          <a:stretch>
-            <a:fillRect/>
-          </a:stretch>
-        </a:blipFill>
-        <a:effectLst/>
-      </p:bgPr>
-    </p:bg>
-    <p:spTree>
-      <p:nvGrpSpPr>
-        <p:cNvPr id="1" name=""/>
-        <p:cNvGrpSpPr/>
-        <p:nvPr/>
-      </p:nvGrpSpPr>
-      <p:grpSpPr>
-        <a:xfrm>
-          <a:off x="0" y="0"/>
-          <a:ext cx="0" cy="0"/>
-          <a:chOff x="0" y="0"/>
-          <a:chExt cx="0" cy="0"/>
-        </a:xfrm>
-      </p:grpSpPr>
-    </p:spTree>
-  </p:cSld>
-  <p:clrMapOvr>
-    <a:masterClrMapping/>
-  </p:clrMapOvr>
-</p:sld>
-</file>
-
-<file path=ppt/slides/slide3.xml><?xml version="1.0" encoding="utf-8"?>
-<p:sld xmlns:a="http://schemas.openxmlformats.org/drawingml/2006/main" xmlns:r="http://schemas.openxmlformats.org/officeDocument/2006/relationships" xmlns:p="http://schemas.openxmlformats.org/presentationml/2006/main">
-  <p:cSld name="Slide 3">
     <p:bg>
       <p:bgPr>
         <a:blipFill dpi="0" rotWithShape="1">

--- a/examples/10_smart_city_twin/Presentation.pptx
+++ b/examples/10_smart_city_twin/Presentation.pptx
@@ -503,8 +503,7 @@
           <a:p>
             <a:r>
               <a:rPr lang="en-US" dirty="0"/>
-              <a:t>Slide 1: Public Dashboard Layout
-note: 공공 스마트시티 대시보드 형태의 4분할 실시간 관제 슬라이드입니다.</a:t>
+              <a:t>공공 스마트시티 대시보드 형태의 4분할 실시간 관제 슬라이드입니다.</a:t>
             </a:r>
             <a:endParaRPr lang="en-US" dirty="0"/>
           </a:p>
@@ -592,7 +591,7 @@
           <a:p>
             <a:r>
               <a:rPr lang="en-US" dirty="0"/>
-              <a:t>Slide 2: Gov Infrastructure Architecture</a:t>
+              <a:t/>
             </a:r>
             <a:endParaRPr lang="en-US" dirty="0"/>
           </a:p>
@@ -946,16 +945,9 @@
   <p:cSld name="Slide 1">
     <p:bg>
       <p:bgPr>
-        <a:blipFill dpi="0" rotWithShape="1">
-          <a:blip r:embed="rId1">
-            <a:lum/>
-          </a:blip>
-          <a:srcRect/>
-          <a:stretch>
-            <a:fillRect/>
-          </a:stretch>
-        </a:blipFill>
-        <a:effectLst/>
+        <a:solidFill>
+          <a:srgbClr val="071322"/>
+        </a:solidFill>
       </p:bgPr>
     </p:bg>
     <p:spTree>
@@ -972,6 +964,896 @@
           <a:chExt cx="0" cy="0"/>
         </a:xfrm>
       </p:grpSpPr>
+      <p:sp>
+        <p:nvSpPr>
+          <p:cNvPr id="2" name="Shape 0"/>
+          <p:cNvSpPr/>
+          <p:nvPr/>
+        </p:nvSpPr>
+        <p:spPr>
+          <a:xfrm>
+            <a:off x="457200" y="361920"/>
+            <a:ext cx="11277570" cy="494690"/>
+          </a:xfrm>
+          <a:prstGeom prst="roundRect">
+            <a:avLst>
+              <a:gd name="adj" fmla="val 11553"/>
+            </a:avLst>
+          </a:prstGeom>
+          <a:solidFill>
+            <a:srgbClr val="0C2138"/>
+          </a:solidFill>
+          <a:ln w="9525">
+            <a:solidFill>
+              <a:srgbClr val="1E3A5F"/>
+            </a:solidFill>
+            <a:prstDash val="solid"/>
+          </a:ln>
+        </p:spPr>
+      </p:sp>
+      <p:sp>
+        <p:nvSpPr>
+          <p:cNvPr id="3" name="Text 1"/>
+          <p:cNvSpPr txBox="1"/>
+          <p:nvPr/>
+        </p:nvSpPr>
+        <p:spPr>
+          <a:xfrm>
+            <a:off x="600121" y="443301"/>
+            <a:ext cx="2858049" cy="323149"/>
+          </a:xfrm>
+          <a:prstGeom prst="rect">
+            <a:avLst/>
+          </a:prstGeom>
+          <a:noFill/>
+          <a:ln/>
+        </p:spPr>
+        <p:txBody>
+          <a:bodyPr wrap="none" lIns="0" tIns="0" rIns="0" bIns="0" rtlCol="0" anchor="t"/>
+          <a:lstStyle/>
+          <a:p>
+            <a:pPr algn="l" indent="0" marL="0">
+              <a:lnSpc>
+                <a:spcPts val="2545"/>
+              </a:lnSpc>
+              <a:buNone/>
+            </a:pPr>
+            <a:r>
+              <a:rPr lang="en-US" sz="1697" b="1" spc="-54" kern="0" dirty="0">
+                <a:solidFill>
+                  <a:srgbClr val="E0F2FE"/>
+                </a:solidFill>
+                <a:latin typeface="Malgun Gothic" pitchFamily="34" charset="0"/>
+                <a:ea typeface="Malgun Gothic" pitchFamily="34" charset="-122"/>
+                <a:cs typeface="Malgun Gothic" pitchFamily="34" charset="-120"/>
+              </a:rPr>
+              <a:t>🏛️ 국토교통부 스마트도시기획단</a:t>
+            </a:r>
+            <a:endParaRPr lang="en-US" sz="1697" dirty="0"/>
+          </a:p>
+        </p:txBody>
+      </p:sp>
+      <p:sp>
+        <p:nvSpPr>
+          <p:cNvPr id="4" name="Text 2"/>
+          <p:cNvSpPr txBox="1"/>
+          <p:nvPr/>
+        </p:nvSpPr>
+        <p:spPr>
+          <a:xfrm>
+            <a:off x="7705283" y="443301"/>
+            <a:ext cx="4175516" cy="323149"/>
+          </a:xfrm>
+          <a:prstGeom prst="rect">
+            <a:avLst/>
+          </a:prstGeom>
+          <a:noFill/>
+          <a:ln/>
+        </p:spPr>
+        <p:txBody>
+          <a:bodyPr wrap="none" lIns="0" tIns="0" rIns="0" bIns="0" rtlCol="0" anchor="t"/>
+          <a:lstStyle/>
+          <a:p>
+            <a:pPr algn="l" indent="0" marL="0">
+              <a:lnSpc>
+                <a:spcPts val="2545"/>
+              </a:lnSpc>
+              <a:buNone/>
+            </a:pPr>
+            <a:r>
+              <a:rPr lang="en-US" sz="1697" b="1" spc="-54" kern="0" dirty="0">
+                <a:solidFill>
+                  <a:srgbClr val="E0F2FE"/>
+                </a:solidFill>
+                <a:latin typeface="Malgun Gothic" pitchFamily="34" charset="0"/>
+                <a:ea typeface="Malgun Gothic" pitchFamily="34" charset="-122"/>
+                <a:cs typeface="Malgun Gothic" pitchFamily="34" charset="-120"/>
+              </a:rPr>
+              <a:t>실시간 국가 재난 안전망 관제 현황 : </a:t>
+            </a:r>
+            <a:pPr algn="l" indent="0" marL="0">
+              <a:lnSpc>
+                <a:spcPts val="2545"/>
+              </a:lnSpc>
+              <a:buNone/>
+            </a:pPr>
+            <a:r>
+              <a:rPr lang="en-US" sz="1697" b="1" spc="-54" kern="0" dirty="0">
+                <a:solidFill>
+                  <a:srgbClr val="38BDF8"/>
+                </a:solidFill>
+                <a:latin typeface="Malgun Gothic" pitchFamily="34" charset="0"/>
+                <a:ea typeface="Malgun Gothic" pitchFamily="34" charset="-122"/>
+                <a:cs typeface="Malgun Gothic" pitchFamily="34" charset="-120"/>
+              </a:rPr>
+              <a:t>정상 가동 중</a:t>
+            </a:r>
+            <a:endParaRPr lang="en-US" sz="1697" dirty="0"/>
+          </a:p>
+        </p:txBody>
+      </p:sp>
+      <p:sp>
+        <p:nvSpPr>
+          <p:cNvPr id="5" name="Text 3"/>
+          <p:cNvSpPr txBox="1"/>
+          <p:nvPr/>
+        </p:nvSpPr>
+        <p:spPr>
+          <a:xfrm>
+            <a:off x="438180" y="1875434"/>
+            <a:ext cx="11315700" cy="1346637"/>
+          </a:xfrm>
+          <a:prstGeom prst="rect">
+            <a:avLst/>
+          </a:prstGeom>
+          <a:noFill/>
+          <a:ln/>
+        </p:spPr>
+        <p:txBody>
+          <a:bodyPr wrap="square" lIns="0" tIns="0" rIns="0" bIns="0" rtlCol="0" anchor="t"/>
+          <a:lstStyle/>
+          <a:p>
+            <a:pPr algn="l" indent="0" marL="0">
+              <a:lnSpc>
+                <a:spcPts val="5302"/>
+              </a:lnSpc>
+              <a:buNone/>
+            </a:pPr>
+            <a:r>
+              <a:rPr lang="en-US" sz="4241" b="1" spc="-54" kern="0" dirty="0">
+                <a:solidFill>
+                  <a:srgbClr val="FFFFFF"/>
+                </a:solidFill>
+                <a:latin typeface="Malgun Gothic" pitchFamily="34" charset="0"/>
+                <a:ea typeface="Malgun Gothic" pitchFamily="34" charset="-122"/>
+                <a:cs typeface="Malgun Gothic" pitchFamily="34" charset="-120"/>
+              </a:rPr>
+              <a:t>전국 지자체 연계 실시간 3D</a:t>
+            </a:r>
+            <a:endParaRPr lang="en-US" sz="4241" dirty="0"/>
+          </a:p>
+          <a:p>
+            <a:pPr algn="l" indent="0" marL="0">
+              <a:lnSpc>
+                <a:spcPts val="5302"/>
+              </a:lnSpc>
+              <a:buNone/>
+            </a:pPr>
+            <a:r>
+              <a:rPr lang="en-US" sz="4241" b="1" spc="-54" kern="0" dirty="0">
+                <a:solidFill>
+                  <a:srgbClr val="38BDF8"/>
+                </a:solidFill>
+                <a:latin typeface="Malgun Gothic" pitchFamily="34" charset="0"/>
+                <a:ea typeface="Malgun Gothic" pitchFamily="34" charset="-122"/>
+                <a:cs typeface="Malgun Gothic" pitchFamily="34" charset="-120"/>
+              </a:rPr>
+              <a:t>스마트시티 디지털 트윈 재난 관제</a:t>
+            </a:r>
+            <a:endParaRPr lang="en-US" sz="4241" dirty="0"/>
+          </a:p>
+        </p:txBody>
+      </p:sp>
+      <p:sp>
+        <p:nvSpPr>
+          <p:cNvPr id="6" name="Shape 4"/>
+          <p:cNvSpPr/>
+          <p:nvPr/>
+        </p:nvSpPr>
+        <p:spPr>
+          <a:xfrm>
+            <a:off x="457200" y="4484766"/>
+            <a:ext cx="5581680" cy="948507"/>
+          </a:xfrm>
+          <a:prstGeom prst="roundRect">
+            <a:avLst>
+              <a:gd name="adj" fmla="val 8030"/>
+            </a:avLst>
+          </a:prstGeom>
+          <a:solidFill>
+            <a:srgbClr val="0A1B30"/>
+          </a:solidFill>
+          <a:ln w="9525">
+            <a:solidFill>
+              <a:srgbClr val="16365C"/>
+            </a:solidFill>
+            <a:prstDash val="solid"/>
+          </a:ln>
+        </p:spPr>
+      </p:sp>
+      <p:sp>
+        <p:nvSpPr>
+          <p:cNvPr id="7" name="Text 5"/>
+          <p:cNvSpPr txBox="1"/>
+          <p:nvPr/>
+        </p:nvSpPr>
+        <p:spPr>
+          <a:xfrm>
+            <a:off x="600121" y="4602450"/>
+            <a:ext cx="1035467" cy="164592"/>
+          </a:xfrm>
+          <a:prstGeom prst="rect">
+            <a:avLst/>
+          </a:prstGeom>
+          <a:noFill/>
+          <a:ln/>
+        </p:spPr>
+        <p:txBody>
+          <a:bodyPr wrap="none" lIns="0" tIns="0" rIns="0" bIns="0" rtlCol="0" anchor="t"/>
+          <a:lstStyle/>
+          <a:p>
+            <a:pPr algn="l" indent="0" marL="0">
+              <a:lnSpc>
+                <a:spcPts val="1296"/>
+              </a:lnSpc>
+              <a:buNone/>
+            </a:pPr>
+            <a:r>
+              <a:rPr lang="en-US" sz="864" spc="-54" kern="0" dirty="0">
+                <a:solidFill>
+                  <a:srgbClr val="7DD3FC"/>
+                </a:solidFill>
+                <a:latin typeface="Malgun Gothic" pitchFamily="34" charset="0"/>
+                <a:ea typeface="Malgun Gothic" pitchFamily="34" charset="-122"/>
+                <a:cs typeface="Malgun Gothic" pitchFamily="34" charset="-120"/>
+              </a:rPr>
+              <a:t>침수 사전 감지 골든타임</a:t>
+            </a:r>
+            <a:endParaRPr lang="en-US" sz="864" dirty="0"/>
+          </a:p>
+        </p:txBody>
+      </p:sp>
+      <p:sp>
+        <p:nvSpPr>
+          <p:cNvPr id="8" name="Shape 6"/>
+          <p:cNvSpPr/>
+          <p:nvPr/>
+        </p:nvSpPr>
+        <p:spPr>
+          <a:xfrm>
+            <a:off x="4958243" y="4608576"/>
+            <a:ext cx="918698" cy="319857"/>
+          </a:xfrm>
+          <a:prstGeom prst="roundRect">
+            <a:avLst>
+              <a:gd name="adj" fmla="val 11921"/>
+            </a:avLst>
+          </a:prstGeom>
+          <a:solidFill>
+            <a:srgbClr val="0284C7"/>
+          </a:solidFill>
+          <a:ln/>
+        </p:spPr>
+      </p:sp>
+      <p:sp>
+        <p:nvSpPr>
+          <p:cNvPr id="9" name="Text 7"/>
+          <p:cNvSpPr txBox="1"/>
+          <p:nvPr/>
+        </p:nvSpPr>
+        <p:spPr>
+          <a:xfrm>
+            <a:off x="4996373" y="4620097"/>
+            <a:ext cx="887791" cy="281727"/>
+          </a:xfrm>
+          <a:prstGeom prst="rect">
+            <a:avLst/>
+          </a:prstGeom>
+          <a:noFill/>
+          <a:ln/>
+        </p:spPr>
+        <p:txBody>
+          <a:bodyPr wrap="none" lIns="0" tIns="0" rIns="0" bIns="0" rtlCol="0" anchor="t"/>
+          <a:lstStyle/>
+          <a:p>
+            <a:pPr algn="l" indent="0" marL="0">
+              <a:lnSpc>
+                <a:spcPts val="2219"/>
+              </a:lnSpc>
+              <a:buNone/>
+            </a:pPr>
+            <a:r>
+              <a:rPr lang="en-US" sz="1479" b="1" spc="-54" kern="0" dirty="0">
+                <a:solidFill>
+                  <a:srgbClr val="FFFFFF"/>
+                </a:solidFill>
+                <a:latin typeface="Malgun Gothic" pitchFamily="34" charset="0"/>
+                <a:ea typeface="Malgun Gothic" pitchFamily="34" charset="-122"/>
+                <a:cs typeface="Malgun Gothic" pitchFamily="34" charset="-120"/>
+              </a:rPr>
+              <a:t>5분 전 경보</a:t>
+            </a:r>
+            <a:endParaRPr lang="en-US" sz="1479" dirty="0"/>
+          </a:p>
+        </p:txBody>
+      </p:sp>
+      <p:sp>
+        <p:nvSpPr>
+          <p:cNvPr id="10" name="Text 8"/>
+          <p:cNvSpPr txBox="1"/>
+          <p:nvPr/>
+        </p:nvSpPr>
+        <p:spPr>
+          <a:xfrm>
+            <a:off x="600121" y="4961717"/>
+            <a:ext cx="5697444" cy="342900"/>
+          </a:xfrm>
+          <a:prstGeom prst="rect">
+            <a:avLst/>
+          </a:prstGeom>
+          <a:noFill/>
+          <a:ln/>
+        </p:spPr>
+        <p:txBody>
+          <a:bodyPr wrap="none" lIns="0" tIns="0" rIns="0" bIns="0" rtlCol="0" anchor="t"/>
+          <a:lstStyle/>
+          <a:p>
+            <a:pPr algn="l" indent="0" marL="0">
+              <a:lnSpc>
+                <a:spcPts val="2700"/>
+              </a:lnSpc>
+              <a:buNone/>
+            </a:pPr>
+            <a:r>
+              <a:rPr lang="en-US" sz="1800" b="1" spc="-54" kern="0" dirty="0">
+                <a:solidFill>
+                  <a:srgbClr val="FFFFFF"/>
+                </a:solidFill>
+                <a:latin typeface="Malgun Gothic" pitchFamily="34" charset="0"/>
+                <a:ea typeface="Malgun Gothic" pitchFamily="34" charset="-122"/>
+                <a:cs typeface="Malgun Gothic" pitchFamily="34" charset="-120"/>
+              </a:rPr>
+              <a:t>100% 자동 통제</a:t>
+            </a:r>
+            <a:endParaRPr lang="en-US" sz="1800" dirty="0"/>
+          </a:p>
+        </p:txBody>
+      </p:sp>
+      <p:sp>
+        <p:nvSpPr>
+          <p:cNvPr id="11" name="Shape 9"/>
+          <p:cNvSpPr/>
+          <p:nvPr/>
+        </p:nvSpPr>
+        <p:spPr>
+          <a:xfrm>
+            <a:off x="6153180" y="4484766"/>
+            <a:ext cx="5581680" cy="948507"/>
+          </a:xfrm>
+          <a:prstGeom prst="roundRect">
+            <a:avLst>
+              <a:gd name="adj" fmla="val 8030"/>
+            </a:avLst>
+          </a:prstGeom>
+          <a:solidFill>
+            <a:srgbClr val="0A1B30"/>
+          </a:solidFill>
+          <a:ln w="9525">
+            <a:solidFill>
+              <a:srgbClr val="16365C"/>
+            </a:solidFill>
+            <a:prstDash val="solid"/>
+          </a:ln>
+        </p:spPr>
+      </p:sp>
+      <p:sp>
+        <p:nvSpPr>
+          <p:cNvPr id="12" name="Text 10"/>
+          <p:cNvSpPr txBox="1"/>
+          <p:nvPr/>
+        </p:nvSpPr>
+        <p:spPr>
+          <a:xfrm>
+            <a:off x="6296010" y="4602450"/>
+            <a:ext cx="845729" cy="164592"/>
+          </a:xfrm>
+          <a:prstGeom prst="rect">
+            <a:avLst/>
+          </a:prstGeom>
+          <a:noFill/>
+          <a:ln/>
+        </p:spPr>
+        <p:txBody>
+          <a:bodyPr wrap="none" lIns="0" tIns="0" rIns="0" bIns="0" rtlCol="0" anchor="t"/>
+          <a:lstStyle/>
+          <a:p>
+            <a:pPr algn="l" indent="0" marL="0">
+              <a:lnSpc>
+                <a:spcPts val="1296"/>
+              </a:lnSpc>
+              <a:buNone/>
+            </a:pPr>
+            <a:r>
+              <a:rPr lang="en-US" sz="864" spc="-54" kern="0" dirty="0">
+                <a:solidFill>
+                  <a:srgbClr val="7DD3FC"/>
+                </a:solidFill>
+                <a:latin typeface="Malgun Gothic" pitchFamily="34" charset="0"/>
+                <a:ea typeface="Malgun Gothic" pitchFamily="34" charset="-122"/>
+                <a:cs typeface="Malgun Gothic" pitchFamily="34" charset="-120"/>
+              </a:rPr>
+              <a:t>긴급 소방 출동 단축</a:t>
+            </a:r>
+            <a:endParaRPr lang="en-US" sz="864" dirty="0"/>
+          </a:p>
+        </p:txBody>
+      </p:sp>
+      <p:sp>
+        <p:nvSpPr>
+          <p:cNvPr id="13" name="Shape 11"/>
+          <p:cNvSpPr/>
+          <p:nvPr/>
+        </p:nvSpPr>
+        <p:spPr>
+          <a:xfrm>
+            <a:off x="10309677" y="4608576"/>
+            <a:ext cx="1263335" cy="319857"/>
+          </a:xfrm>
+          <a:prstGeom prst="roundRect">
+            <a:avLst>
+              <a:gd name="adj" fmla="val 11921"/>
+            </a:avLst>
+          </a:prstGeom>
+          <a:solidFill>
+            <a:srgbClr val="10B981"/>
+          </a:solidFill>
+          <a:ln/>
+        </p:spPr>
+      </p:sp>
+      <p:sp>
+        <p:nvSpPr>
+          <p:cNvPr id="14" name="Text 12"/>
+          <p:cNvSpPr txBox="1"/>
+          <p:nvPr/>
+        </p:nvSpPr>
+        <p:spPr>
+          <a:xfrm>
+            <a:off x="10347808" y="4620097"/>
+            <a:ext cx="1259952" cy="281727"/>
+          </a:xfrm>
+          <a:prstGeom prst="rect">
+            <a:avLst/>
+          </a:prstGeom>
+          <a:noFill/>
+          <a:ln/>
+        </p:spPr>
+        <p:txBody>
+          <a:bodyPr wrap="none" lIns="0" tIns="0" rIns="0" bIns="0" rtlCol="0" anchor="t"/>
+          <a:lstStyle/>
+          <a:p>
+            <a:pPr algn="l" indent="0" marL="0">
+              <a:lnSpc>
+                <a:spcPts val="2219"/>
+              </a:lnSpc>
+              <a:buNone/>
+            </a:pPr>
+            <a:r>
+              <a:rPr lang="en-US" sz="1479" b="1" spc="-54" kern="0" dirty="0">
+                <a:solidFill>
+                  <a:srgbClr val="FFFFFF"/>
+                </a:solidFill>
+                <a:latin typeface="Malgun Gothic" pitchFamily="34" charset="0"/>
+                <a:ea typeface="Malgun Gothic" pitchFamily="34" charset="-122"/>
+                <a:cs typeface="Malgun Gothic" pitchFamily="34" charset="-120"/>
+              </a:rPr>
+              <a:t>-41% 시간 절감</a:t>
+            </a:r>
+            <a:endParaRPr lang="en-US" sz="1479" dirty="0"/>
+          </a:p>
+        </p:txBody>
+      </p:sp>
+      <p:sp>
+        <p:nvSpPr>
+          <p:cNvPr id="15" name="Text 13"/>
+          <p:cNvSpPr txBox="1"/>
+          <p:nvPr/>
+        </p:nvSpPr>
+        <p:spPr>
+          <a:xfrm>
+            <a:off x="6296010" y="4961717"/>
+            <a:ext cx="5697444" cy="342900"/>
+          </a:xfrm>
+          <a:prstGeom prst="rect">
+            <a:avLst/>
+          </a:prstGeom>
+          <a:noFill/>
+          <a:ln/>
+        </p:spPr>
+        <p:txBody>
+          <a:bodyPr wrap="none" lIns="0" tIns="0" rIns="0" bIns="0" rtlCol="0" anchor="t"/>
+          <a:lstStyle/>
+          <a:p>
+            <a:pPr algn="l" indent="0" marL="0">
+              <a:lnSpc>
+                <a:spcPts val="2700"/>
+              </a:lnSpc>
+              <a:buNone/>
+            </a:pPr>
+            <a:r>
+              <a:rPr lang="en-US" sz="1800" b="1" spc="-54" kern="0" dirty="0">
+                <a:solidFill>
+                  <a:srgbClr val="FFFFFF"/>
+                </a:solidFill>
+                <a:latin typeface="Malgun Gothic" pitchFamily="34" charset="0"/>
+                <a:ea typeface="Malgun Gothic" pitchFamily="34" charset="-122"/>
+                <a:cs typeface="Malgun Gothic" pitchFamily="34" charset="-120"/>
+              </a:rPr>
+              <a:t>신호등 우선 제어</a:t>
+            </a:r>
+            <a:endParaRPr lang="en-US" sz="1800" dirty="0"/>
+          </a:p>
+        </p:txBody>
+      </p:sp>
+      <p:sp>
+        <p:nvSpPr>
+          <p:cNvPr id="16" name="Shape 14"/>
+          <p:cNvSpPr/>
+          <p:nvPr/>
+        </p:nvSpPr>
+        <p:spPr>
+          <a:xfrm>
+            <a:off x="457200" y="5547573"/>
+            <a:ext cx="5581680" cy="948507"/>
+          </a:xfrm>
+          <a:prstGeom prst="roundRect">
+            <a:avLst>
+              <a:gd name="adj" fmla="val 8030"/>
+            </a:avLst>
+          </a:prstGeom>
+          <a:solidFill>
+            <a:srgbClr val="0A1B30"/>
+          </a:solidFill>
+          <a:ln w="9525">
+            <a:solidFill>
+              <a:srgbClr val="16365C"/>
+            </a:solidFill>
+            <a:prstDash val="solid"/>
+          </a:ln>
+        </p:spPr>
+      </p:sp>
+      <p:sp>
+        <p:nvSpPr>
+          <p:cNvPr id="17" name="Text 15"/>
+          <p:cNvSpPr txBox="1"/>
+          <p:nvPr/>
+        </p:nvSpPr>
+        <p:spPr>
+          <a:xfrm>
+            <a:off x="600121" y="5665257"/>
+            <a:ext cx="985083" cy="164592"/>
+          </a:xfrm>
+          <a:prstGeom prst="rect">
+            <a:avLst/>
+          </a:prstGeom>
+          <a:noFill/>
+          <a:ln/>
+        </p:spPr>
+        <p:txBody>
+          <a:bodyPr wrap="none" lIns="0" tIns="0" rIns="0" bIns="0" rtlCol="0" anchor="t"/>
+          <a:lstStyle/>
+          <a:p>
+            <a:pPr algn="l" indent="0" marL="0">
+              <a:lnSpc>
+                <a:spcPts val="1296"/>
+              </a:lnSpc>
+              <a:buNone/>
+            </a:pPr>
+            <a:r>
+              <a:rPr lang="en-US" sz="864" spc="-54" kern="0" dirty="0">
+                <a:solidFill>
+                  <a:srgbClr val="7DD3FC"/>
+                </a:solidFill>
+                <a:latin typeface="Malgun Gothic" pitchFamily="34" charset="0"/>
+                <a:ea typeface="Malgun Gothic" pitchFamily="34" charset="-122"/>
+                <a:cs typeface="Malgun Gothic" pitchFamily="34" charset="-120"/>
+              </a:rPr>
+              <a:t>지하 매설물 3D 가시화</a:t>
+            </a:r>
+            <a:endParaRPr lang="en-US" sz="864" dirty="0"/>
+          </a:p>
+        </p:txBody>
+      </p:sp>
+      <p:sp>
+        <p:nvSpPr>
+          <p:cNvPr id="18" name="Shape 16"/>
+          <p:cNvSpPr/>
+          <p:nvPr/>
+        </p:nvSpPr>
+        <p:spPr>
+          <a:xfrm>
+            <a:off x="4912340" y="5671383"/>
+            <a:ext cx="964601" cy="319857"/>
+          </a:xfrm>
+          <a:prstGeom prst="roundRect">
+            <a:avLst>
+              <a:gd name="adj" fmla="val 11921"/>
+            </a:avLst>
+          </a:prstGeom>
+          <a:solidFill>
+            <a:srgbClr val="0284C7"/>
+          </a:solidFill>
+          <a:ln/>
+        </p:spPr>
+      </p:sp>
+      <p:sp>
+        <p:nvSpPr>
+          <p:cNvPr id="19" name="Text 17"/>
+          <p:cNvSpPr txBox="1"/>
+          <p:nvPr/>
+        </p:nvSpPr>
+        <p:spPr>
+          <a:xfrm>
+            <a:off x="4950470" y="5682905"/>
+            <a:ext cx="937351" cy="281727"/>
+          </a:xfrm>
+          <a:prstGeom prst="rect">
+            <a:avLst/>
+          </a:prstGeom>
+          <a:noFill/>
+          <a:ln/>
+        </p:spPr>
+        <p:txBody>
+          <a:bodyPr wrap="none" lIns="0" tIns="0" rIns="0" bIns="0" rtlCol="0" anchor="t"/>
+          <a:lstStyle/>
+          <a:p>
+            <a:pPr algn="l" indent="0" marL="0">
+              <a:lnSpc>
+                <a:spcPts val="2219"/>
+              </a:lnSpc>
+              <a:buNone/>
+            </a:pPr>
+            <a:r>
+              <a:rPr lang="en-US" sz="1479" b="1" spc="-54" kern="0" dirty="0">
+                <a:solidFill>
+                  <a:srgbClr val="FFFFFF"/>
+                </a:solidFill>
+                <a:latin typeface="Malgun Gothic" pitchFamily="34" charset="0"/>
+                <a:ea typeface="Malgun Gothic" pitchFamily="34" charset="-122"/>
+                <a:cs typeface="Malgun Gothic" pitchFamily="34" charset="-120"/>
+              </a:rPr>
+              <a:t>100% 완비</a:t>
+            </a:r>
+            <a:endParaRPr lang="en-US" sz="1479" dirty="0"/>
+          </a:p>
+        </p:txBody>
+      </p:sp>
+      <p:sp>
+        <p:nvSpPr>
+          <p:cNvPr id="20" name="Text 18"/>
+          <p:cNvSpPr txBox="1"/>
+          <p:nvPr/>
+        </p:nvSpPr>
+        <p:spPr>
+          <a:xfrm>
+            <a:off x="600121" y="6024524"/>
+            <a:ext cx="5697444" cy="342900"/>
+          </a:xfrm>
+          <a:prstGeom prst="rect">
+            <a:avLst/>
+          </a:prstGeom>
+          <a:noFill/>
+          <a:ln/>
+        </p:spPr>
+        <p:txBody>
+          <a:bodyPr wrap="none" lIns="0" tIns="0" rIns="0" bIns="0" rtlCol="0" anchor="t"/>
+          <a:lstStyle/>
+          <a:p>
+            <a:pPr algn="l" indent="0" marL="0">
+              <a:lnSpc>
+                <a:spcPts val="2700"/>
+              </a:lnSpc>
+              <a:buNone/>
+            </a:pPr>
+            <a:r>
+              <a:rPr lang="en-US" sz="1800" b="1" spc="-54" kern="0" dirty="0">
+                <a:solidFill>
+                  <a:srgbClr val="FFFFFF"/>
+                </a:solidFill>
+                <a:latin typeface="Malgun Gothic" pitchFamily="34" charset="0"/>
+                <a:ea typeface="Malgun Gothic" pitchFamily="34" charset="-122"/>
+                <a:cs typeface="Malgun Gothic" pitchFamily="34" charset="-120"/>
+              </a:rPr>
+              <a:t>상하수도·가스관 맵</a:t>
+            </a:r>
+            <a:endParaRPr lang="en-US" sz="1800" dirty="0"/>
+          </a:p>
+        </p:txBody>
+      </p:sp>
+      <p:sp>
+        <p:nvSpPr>
+          <p:cNvPr id="21" name="Shape 19"/>
+          <p:cNvSpPr/>
+          <p:nvPr/>
+        </p:nvSpPr>
+        <p:spPr>
+          <a:xfrm>
+            <a:off x="6153180" y="5547573"/>
+            <a:ext cx="5581680" cy="948507"/>
+          </a:xfrm>
+          <a:prstGeom prst="roundRect">
+            <a:avLst>
+              <a:gd name="adj" fmla="val 8030"/>
+            </a:avLst>
+          </a:prstGeom>
+          <a:solidFill>
+            <a:srgbClr val="0A1B30"/>
+          </a:solidFill>
+          <a:ln w="9525">
+            <a:solidFill>
+              <a:srgbClr val="16365C"/>
+            </a:solidFill>
+            <a:prstDash val="solid"/>
+          </a:ln>
+        </p:spPr>
+      </p:sp>
+      <p:sp>
+        <p:nvSpPr>
+          <p:cNvPr id="22" name="Text 20"/>
+          <p:cNvSpPr txBox="1"/>
+          <p:nvPr/>
+        </p:nvSpPr>
+        <p:spPr>
+          <a:xfrm>
+            <a:off x="6296010" y="5665257"/>
+            <a:ext cx="732983" cy="164592"/>
+          </a:xfrm>
+          <a:prstGeom prst="rect">
+            <a:avLst/>
+          </a:prstGeom>
+          <a:noFill/>
+          <a:ln/>
+        </p:spPr>
+        <p:txBody>
+          <a:bodyPr wrap="none" lIns="0" tIns="0" rIns="0" bIns="0" rtlCol="0" anchor="t"/>
+          <a:lstStyle/>
+          <a:p>
+            <a:pPr algn="l" indent="0" marL="0">
+              <a:lnSpc>
+                <a:spcPts val="1296"/>
+              </a:lnSpc>
+              <a:buNone/>
+            </a:pPr>
+            <a:r>
+              <a:rPr lang="en-US" sz="864" spc="-54" kern="0" dirty="0">
+                <a:solidFill>
+                  <a:srgbClr val="7DD3FC"/>
+                </a:solidFill>
+                <a:latin typeface="Malgun Gothic" pitchFamily="34" charset="0"/>
+                <a:ea typeface="Malgun Gothic" pitchFamily="34" charset="-122"/>
+                <a:cs typeface="Malgun Gothic" pitchFamily="34" charset="-120"/>
+              </a:rPr>
+              <a:t>전국 지자체 보급</a:t>
+            </a:r>
+            <a:endParaRPr lang="en-US" sz="864" dirty="0"/>
+          </a:p>
+        </p:txBody>
+      </p:sp>
+      <p:sp>
+        <p:nvSpPr>
+          <p:cNvPr id="23" name="Shape 21"/>
+          <p:cNvSpPr/>
+          <p:nvPr/>
+        </p:nvSpPr>
+        <p:spPr>
+          <a:xfrm>
+            <a:off x="10467960" y="5671383"/>
+            <a:ext cx="1104870" cy="319857"/>
+          </a:xfrm>
+          <a:prstGeom prst="roundRect">
+            <a:avLst>
+              <a:gd name="adj" fmla="val 11921"/>
+            </a:avLst>
+          </a:prstGeom>
+          <a:solidFill>
+            <a:srgbClr val="6366F1"/>
+          </a:solidFill>
+          <a:ln/>
+        </p:spPr>
+      </p:sp>
+      <p:sp>
+        <p:nvSpPr>
+          <p:cNvPr id="24" name="Text 22"/>
+          <p:cNvSpPr txBox="1"/>
+          <p:nvPr/>
+        </p:nvSpPr>
+        <p:spPr>
+          <a:xfrm>
+            <a:off x="10506090" y="5682905"/>
+            <a:ext cx="1088868" cy="281727"/>
+          </a:xfrm>
+          <a:prstGeom prst="rect">
+            <a:avLst/>
+          </a:prstGeom>
+          <a:noFill/>
+          <a:ln/>
+        </p:spPr>
+        <p:txBody>
+          <a:bodyPr wrap="none" lIns="0" tIns="0" rIns="0" bIns="0" rtlCol="0" anchor="t"/>
+          <a:lstStyle/>
+          <a:p>
+            <a:pPr algn="l" indent="0" marL="0">
+              <a:lnSpc>
+                <a:spcPts val="2219"/>
+              </a:lnSpc>
+              <a:buNone/>
+            </a:pPr>
+            <a:r>
+              <a:rPr lang="en-US" sz="1479" b="1" spc="-54" kern="0" dirty="0">
+                <a:solidFill>
+                  <a:srgbClr val="FFFFFF"/>
+                </a:solidFill>
+                <a:latin typeface="Malgun Gothic" pitchFamily="34" charset="0"/>
+                <a:ea typeface="Malgun Gothic" pitchFamily="34" charset="-122"/>
+                <a:cs typeface="Malgun Gothic" pitchFamily="34" charset="-120"/>
+              </a:rPr>
+              <a:t>226개 시군구</a:t>
+            </a:r>
+            <a:endParaRPr lang="en-US" sz="1479" dirty="0"/>
+          </a:p>
+        </p:txBody>
+      </p:sp>
+      <p:sp>
+        <p:nvSpPr>
+          <p:cNvPr id="25" name="Text 23"/>
+          <p:cNvSpPr txBox="1"/>
+          <p:nvPr/>
+        </p:nvSpPr>
+        <p:spPr>
+          <a:xfrm>
+            <a:off x="6296010" y="6024524"/>
+            <a:ext cx="5697444" cy="342900"/>
+          </a:xfrm>
+          <a:prstGeom prst="rect">
+            <a:avLst/>
+          </a:prstGeom>
+          <a:noFill/>
+          <a:ln/>
+        </p:spPr>
+        <p:txBody>
+          <a:bodyPr wrap="none" lIns="0" tIns="0" rIns="0" bIns="0" rtlCol="0" anchor="t"/>
+          <a:lstStyle/>
+          <a:p>
+            <a:pPr algn="l" indent="0" marL="0">
+              <a:lnSpc>
+                <a:spcPts val="2700"/>
+              </a:lnSpc>
+              <a:buNone/>
+            </a:pPr>
+            <a:r>
+              <a:rPr lang="en-US" sz="1800" b="1" spc="-54" kern="0" dirty="0">
+                <a:solidFill>
+                  <a:srgbClr val="FFFFFF"/>
+                </a:solidFill>
+                <a:latin typeface="Malgun Gothic" pitchFamily="34" charset="0"/>
+                <a:ea typeface="Malgun Gothic" pitchFamily="34" charset="-122"/>
+                <a:cs typeface="Malgun Gothic" pitchFamily="34" charset="-120"/>
+              </a:rPr>
+              <a:t>K-스마트시티 표준</a:t>
+            </a:r>
+            <a:endParaRPr lang="en-US" sz="1800" dirty="0"/>
+          </a:p>
+        </p:txBody>
+      </p:sp>
     </p:spTree>
   </p:cSld>
   <p:clrMapOvr>
@@ -985,16 +1867,9 @@
   <p:cSld name="Slide 2">
     <p:bg>
       <p:bgPr>
-        <a:blipFill dpi="0" rotWithShape="1">
-          <a:blip r:embed="rId1">
-            <a:lum/>
-          </a:blip>
-          <a:srcRect/>
-          <a:stretch>
-            <a:fillRect/>
-          </a:stretch>
-        </a:blipFill>
-        <a:effectLst/>
+        <a:solidFill>
+          <a:srgbClr val="071322"/>
+        </a:solidFill>
       </p:bgPr>
     </p:bg>
     <p:spTree>
@@ -1011,6 +1886,534 @@
           <a:chExt cx="0" cy="0"/>
         </a:xfrm>
       </p:grpSpPr>
+      <p:sp>
+        <p:nvSpPr>
+          <p:cNvPr id="2" name="Shape 0"/>
+          <p:cNvSpPr/>
+          <p:nvPr/>
+        </p:nvSpPr>
+        <p:spPr>
+          <a:xfrm>
+            <a:off x="457200" y="361920"/>
+            <a:ext cx="11277570" cy="494690"/>
+          </a:xfrm>
+          <a:prstGeom prst="roundRect">
+            <a:avLst>
+              <a:gd name="adj" fmla="val 11553"/>
+            </a:avLst>
+          </a:prstGeom>
+          <a:solidFill>
+            <a:srgbClr val="0C2138"/>
+          </a:solidFill>
+          <a:ln w="9525">
+            <a:solidFill>
+              <a:srgbClr val="1E3A5F"/>
+            </a:solidFill>
+            <a:prstDash val="solid"/>
+          </a:ln>
+        </p:spPr>
+      </p:sp>
+      <p:sp>
+        <p:nvSpPr>
+          <p:cNvPr id="3" name="Text 1"/>
+          <p:cNvSpPr txBox="1"/>
+          <p:nvPr/>
+        </p:nvSpPr>
+        <p:spPr>
+          <a:xfrm>
+            <a:off x="600121" y="443210"/>
+            <a:ext cx="3817346" cy="323149"/>
+          </a:xfrm>
+          <a:prstGeom prst="rect">
+            <a:avLst/>
+          </a:prstGeom>
+          <a:noFill/>
+          <a:ln/>
+        </p:spPr>
+        <p:txBody>
+          <a:bodyPr wrap="none" lIns="0" tIns="0" rIns="0" bIns="0" rtlCol="0" anchor="t"/>
+          <a:lstStyle/>
+          <a:p>
+            <a:pPr algn="l" indent="0" marL="0">
+              <a:lnSpc>
+                <a:spcPts val="2545"/>
+              </a:lnSpc>
+              <a:buNone/>
+            </a:pPr>
+            <a:r>
+              <a:rPr lang="en-US" sz="1697" b="1" spc="-54" kern="0" dirty="0">
+                <a:solidFill>
+                  <a:srgbClr val="E0F2FE"/>
+                </a:solidFill>
+                <a:latin typeface="Malgun Gothic" pitchFamily="34" charset="0"/>
+                <a:ea typeface="Malgun Gothic" pitchFamily="34" charset="-122"/>
+                <a:cs typeface="Malgun Gothic" pitchFamily="34" charset="-120"/>
+              </a:rPr>
+              <a:t>🏛️ 국가 스마트시티 디지털 트윈 인프라 체계</a:t>
+            </a:r>
+            <a:endParaRPr lang="en-US" sz="1697" dirty="0"/>
+          </a:p>
+        </p:txBody>
+      </p:sp>
+      <p:sp>
+        <p:nvSpPr>
+          <p:cNvPr id="4" name="Text 2"/>
+          <p:cNvSpPr txBox="1"/>
+          <p:nvPr/>
+        </p:nvSpPr>
+        <p:spPr>
+          <a:xfrm>
+            <a:off x="9209014" y="443210"/>
+            <a:ext cx="2551359" cy="323149"/>
+          </a:xfrm>
+          <a:prstGeom prst="rect">
+            <a:avLst/>
+          </a:prstGeom>
+          <a:noFill/>
+          <a:ln/>
+        </p:spPr>
+        <p:txBody>
+          <a:bodyPr wrap="none" lIns="0" tIns="0" rIns="0" bIns="0" rtlCol="0" anchor="t"/>
+          <a:lstStyle/>
+          <a:p>
+            <a:pPr algn="l" indent="0" marL="0">
+              <a:lnSpc>
+                <a:spcPts val="2545"/>
+              </a:lnSpc>
+              <a:buNone/>
+            </a:pPr>
+            <a:r>
+              <a:rPr lang="en-US" sz="1697" b="1" spc="-54" kern="0" dirty="0">
+                <a:solidFill>
+                  <a:srgbClr val="38BDF8"/>
+                </a:solidFill>
+                <a:latin typeface="Malgun Gothic" pitchFamily="34" charset="0"/>
+                <a:ea typeface="Malgun Gothic" pitchFamily="34" charset="-122"/>
+                <a:cs typeface="Malgun Gothic" pitchFamily="34" charset="-120"/>
+              </a:rPr>
+              <a:t>전국 226개 지자체 통합 연계</a:t>
+            </a:r>
+            <a:endParaRPr lang="en-US" sz="1697" dirty="0"/>
+          </a:p>
+        </p:txBody>
+      </p:sp>
+      <p:sp>
+        <p:nvSpPr>
+          <p:cNvPr id="5" name="Text 3"/>
+          <p:cNvSpPr txBox="1"/>
+          <p:nvPr/>
+        </p:nvSpPr>
+        <p:spPr>
+          <a:xfrm>
+            <a:off x="438180" y="2362352"/>
+            <a:ext cx="12198828" cy="276240"/>
+          </a:xfrm>
+          <a:prstGeom prst="rect">
+            <a:avLst/>
+          </a:prstGeom>
+          <a:noFill/>
+          <a:ln/>
+        </p:spPr>
+        <p:txBody>
+          <a:bodyPr wrap="none" lIns="0" tIns="0" rIns="0" bIns="0" rtlCol="0" anchor="t"/>
+          <a:lstStyle/>
+          <a:p>
+            <a:pPr algn="l" indent="0" marL="0">
+              <a:lnSpc>
+                <a:spcPts val="2175"/>
+              </a:lnSpc>
+              <a:buNone/>
+            </a:pPr>
+            <a:r>
+              <a:rPr lang="en-US" sz="1740" b="1" spc="-54" kern="0" dirty="0">
+                <a:solidFill>
+                  <a:srgbClr val="FFFFFF"/>
+                </a:solidFill>
+                <a:latin typeface="Malgun Gothic" pitchFamily="34" charset="0"/>
+                <a:ea typeface="Malgun Gothic" pitchFamily="34" charset="-122"/>
+                <a:cs typeface="Malgun Gothic" pitchFamily="34" charset="-120"/>
+              </a:rPr>
+              <a:t>3계층 통합 재난 관제 및 대시민 안전망</a:t>
+            </a:r>
+            <a:endParaRPr lang="en-US" sz="1740" dirty="0"/>
+          </a:p>
+        </p:txBody>
+      </p:sp>
+      <p:sp>
+        <p:nvSpPr>
+          <p:cNvPr id="6" name="Shape 4"/>
+          <p:cNvSpPr/>
+          <p:nvPr/>
+        </p:nvSpPr>
+        <p:spPr>
+          <a:xfrm>
+            <a:off x="457200" y="4220047"/>
+            <a:ext cx="3670310" cy="658277"/>
+          </a:xfrm>
+          <a:prstGeom prst="roundRect">
+            <a:avLst>
+              <a:gd name="adj" fmla="val 11571"/>
+            </a:avLst>
+          </a:prstGeom>
+          <a:solidFill>
+            <a:srgbClr val="0A1B30"/>
+          </a:solidFill>
+          <a:ln w="9525">
+            <a:solidFill>
+              <a:srgbClr val="16365C"/>
+            </a:solidFill>
+            <a:prstDash val="solid"/>
+          </a:ln>
+        </p:spPr>
+      </p:sp>
+      <p:sp>
+        <p:nvSpPr>
+          <p:cNvPr id="7" name="Text 5"/>
+          <p:cNvSpPr txBox="1"/>
+          <p:nvPr/>
+        </p:nvSpPr>
+        <p:spPr>
+          <a:xfrm>
+            <a:off x="600121" y="4341937"/>
+            <a:ext cx="3633186" cy="194310"/>
+          </a:xfrm>
+          <a:prstGeom prst="rect">
+            <a:avLst/>
+          </a:prstGeom>
+          <a:noFill/>
+          <a:ln/>
+        </p:spPr>
+        <p:txBody>
+          <a:bodyPr wrap="none" lIns="0" tIns="0" rIns="0" bIns="0" rtlCol="0" anchor="t"/>
+          <a:lstStyle/>
+          <a:p>
+            <a:pPr algn="l" indent="0" marL="0">
+              <a:lnSpc>
+                <a:spcPts val="1530"/>
+              </a:lnSpc>
+              <a:buNone/>
+            </a:pPr>
+            <a:r>
+              <a:rPr lang="en-US" sz="1020" b="1" spc="-54" kern="0" dirty="0">
+                <a:solidFill>
+                  <a:srgbClr val="38BDF8"/>
+                </a:solidFill>
+                <a:latin typeface="Malgun Gothic" pitchFamily="34" charset="0"/>
+                <a:ea typeface="Malgun Gothic" pitchFamily="34" charset="-122"/>
+                <a:cs typeface="Malgun Gothic" pitchFamily="34" charset="-120"/>
+              </a:rPr>
+              <a:t>LAYER 1: 센서 &amp; GIS</a:t>
+            </a:r>
+            <a:endParaRPr lang="en-US" sz="1020" dirty="0"/>
+          </a:p>
+        </p:txBody>
+      </p:sp>
+      <p:sp>
+        <p:nvSpPr>
+          <p:cNvPr id="8" name="Text 6"/>
+          <p:cNvSpPr txBox="1"/>
+          <p:nvPr/>
+        </p:nvSpPr>
+        <p:spPr>
+          <a:xfrm>
+            <a:off x="600121" y="4567977"/>
+            <a:ext cx="3633186" cy="178308"/>
+          </a:xfrm>
+          <a:prstGeom prst="rect">
+            <a:avLst/>
+          </a:prstGeom>
+          <a:noFill/>
+          <a:ln/>
+        </p:spPr>
+        <p:txBody>
+          <a:bodyPr wrap="none" lIns="0" tIns="0" rIns="0" bIns="0" rtlCol="0" anchor="t"/>
+          <a:lstStyle/>
+          <a:p>
+            <a:pPr algn="l" indent="0" marL="0">
+              <a:lnSpc>
+                <a:spcPts val="1404"/>
+              </a:lnSpc>
+              <a:buNone/>
+            </a:pPr>
+            <a:r>
+              <a:rPr lang="en-US" sz="936" spc="-54" kern="0" dirty="0">
+                <a:solidFill>
+                  <a:srgbClr val="BAE6FD"/>
+                </a:solidFill>
+                <a:latin typeface="Malgun Gothic" pitchFamily="34" charset="0"/>
+                <a:ea typeface="Malgun Gothic" pitchFamily="34" charset="-122"/>
+                <a:cs typeface="Malgun Gothic" pitchFamily="34" charset="-120"/>
+              </a:rPr>
+              <a:t>IoT 수위계, 지능형 CCTV, 3D 지하 매설물 데이터 수집</a:t>
+            </a:r>
+            <a:endParaRPr lang="en-US" sz="936" dirty="0"/>
+          </a:p>
+        </p:txBody>
+      </p:sp>
+      <p:sp>
+        <p:nvSpPr>
+          <p:cNvPr id="9" name="Shape 7"/>
+          <p:cNvSpPr/>
+          <p:nvPr/>
+        </p:nvSpPr>
+        <p:spPr>
+          <a:xfrm>
+            <a:off x="4260830" y="4220047"/>
+            <a:ext cx="3670310" cy="658277"/>
+          </a:xfrm>
+          <a:prstGeom prst="roundRect">
+            <a:avLst>
+              <a:gd name="adj" fmla="val 11571"/>
+            </a:avLst>
+          </a:prstGeom>
+          <a:solidFill>
+            <a:srgbClr val="0A1B30"/>
+          </a:solidFill>
+          <a:ln w="9525">
+            <a:solidFill>
+              <a:srgbClr val="16365C"/>
+            </a:solidFill>
+            <a:prstDash val="solid"/>
+          </a:ln>
+        </p:spPr>
+      </p:sp>
+      <p:sp>
+        <p:nvSpPr>
+          <p:cNvPr id="10" name="Text 8"/>
+          <p:cNvSpPr txBox="1"/>
+          <p:nvPr/>
+        </p:nvSpPr>
+        <p:spPr>
+          <a:xfrm>
+            <a:off x="4403659" y="4341937"/>
+            <a:ext cx="3633186" cy="194310"/>
+          </a:xfrm>
+          <a:prstGeom prst="rect">
+            <a:avLst/>
+          </a:prstGeom>
+          <a:noFill/>
+          <a:ln/>
+        </p:spPr>
+        <p:txBody>
+          <a:bodyPr wrap="none" lIns="0" tIns="0" rIns="0" bIns="0" rtlCol="0" anchor="t"/>
+          <a:lstStyle/>
+          <a:p>
+            <a:pPr algn="l" indent="0" marL="0">
+              <a:lnSpc>
+                <a:spcPts val="1530"/>
+              </a:lnSpc>
+              <a:buNone/>
+            </a:pPr>
+            <a:r>
+              <a:rPr lang="en-US" sz="1020" b="1" spc="-54" kern="0" dirty="0">
+                <a:solidFill>
+                  <a:srgbClr val="10B981"/>
+                </a:solidFill>
+                <a:latin typeface="Malgun Gothic" pitchFamily="34" charset="0"/>
+                <a:ea typeface="Malgun Gothic" pitchFamily="34" charset="-122"/>
+                <a:cs typeface="Malgun Gothic" pitchFamily="34" charset="-120"/>
+              </a:rPr>
+              <a:t>LAYER 2: AI 시뮬레이션</a:t>
+            </a:r>
+            <a:endParaRPr lang="en-US" sz="1020" dirty="0"/>
+          </a:p>
+        </p:txBody>
+      </p:sp>
+      <p:sp>
+        <p:nvSpPr>
+          <p:cNvPr id="11" name="Text 9"/>
+          <p:cNvSpPr txBox="1"/>
+          <p:nvPr/>
+        </p:nvSpPr>
+        <p:spPr>
+          <a:xfrm>
+            <a:off x="4403659" y="4567977"/>
+            <a:ext cx="3633186" cy="178308"/>
+          </a:xfrm>
+          <a:prstGeom prst="rect">
+            <a:avLst/>
+          </a:prstGeom>
+          <a:noFill/>
+          <a:ln/>
+        </p:spPr>
+        <p:txBody>
+          <a:bodyPr wrap="none" lIns="0" tIns="0" rIns="0" bIns="0" rtlCol="0" anchor="t"/>
+          <a:lstStyle/>
+          <a:p>
+            <a:pPr algn="l" indent="0" marL="0">
+              <a:lnSpc>
+                <a:spcPts val="1404"/>
+              </a:lnSpc>
+              <a:buNone/>
+            </a:pPr>
+            <a:r>
+              <a:rPr lang="en-US" sz="936" spc="-54" kern="0" dirty="0">
+                <a:solidFill>
+                  <a:srgbClr val="BAE6FD"/>
+                </a:solidFill>
+                <a:latin typeface="Malgun Gothic" pitchFamily="34" charset="0"/>
+                <a:ea typeface="Malgun Gothic" pitchFamily="34" charset="-122"/>
+                <a:cs typeface="Malgun Gothic" pitchFamily="34" charset="-120"/>
+              </a:rPr>
+              <a:t>강우량에 따른 침수 확산 5분 전 예측 및 대피 경로 자동 산출</a:t>
+            </a:r>
+            <a:endParaRPr lang="en-US" sz="936" dirty="0"/>
+          </a:p>
+        </p:txBody>
+      </p:sp>
+      <p:sp>
+        <p:nvSpPr>
+          <p:cNvPr id="12" name="Shape 10"/>
+          <p:cNvSpPr/>
+          <p:nvPr/>
+        </p:nvSpPr>
+        <p:spPr>
+          <a:xfrm>
+            <a:off x="8064459" y="4220047"/>
+            <a:ext cx="3670402" cy="658277"/>
+          </a:xfrm>
+          <a:prstGeom prst="roundRect">
+            <a:avLst>
+              <a:gd name="adj" fmla="val 11571"/>
+            </a:avLst>
+          </a:prstGeom>
+          <a:solidFill>
+            <a:srgbClr val="0A1B30"/>
+          </a:solidFill>
+          <a:ln w="9525">
+            <a:solidFill>
+              <a:srgbClr val="16365C"/>
+            </a:solidFill>
+            <a:prstDash val="solid"/>
+          </a:ln>
+        </p:spPr>
+      </p:sp>
+      <p:sp>
+        <p:nvSpPr>
+          <p:cNvPr id="13" name="Text 11"/>
+          <p:cNvSpPr txBox="1"/>
+          <p:nvPr/>
+        </p:nvSpPr>
+        <p:spPr>
+          <a:xfrm>
+            <a:off x="8207289" y="4341937"/>
+            <a:ext cx="3633277" cy="194310"/>
+          </a:xfrm>
+          <a:prstGeom prst="rect">
+            <a:avLst/>
+          </a:prstGeom>
+          <a:noFill/>
+          <a:ln/>
+        </p:spPr>
+        <p:txBody>
+          <a:bodyPr wrap="none" lIns="0" tIns="0" rIns="0" bIns="0" rtlCol="0" anchor="t"/>
+          <a:lstStyle/>
+          <a:p>
+            <a:pPr algn="l" indent="0" marL="0">
+              <a:lnSpc>
+                <a:spcPts val="1530"/>
+              </a:lnSpc>
+              <a:buNone/>
+            </a:pPr>
+            <a:r>
+              <a:rPr lang="en-US" sz="1020" b="1" spc="-54" kern="0" dirty="0">
+                <a:solidFill>
+                  <a:srgbClr val="6366F1"/>
+                </a:solidFill>
+                <a:latin typeface="Malgun Gothic" pitchFamily="34" charset="0"/>
+                <a:ea typeface="Malgun Gothic" pitchFamily="34" charset="-122"/>
+                <a:cs typeface="Malgun Gothic" pitchFamily="34" charset="-120"/>
+              </a:rPr>
+              <a:t>LAYER 3: 자동 현장 제어</a:t>
+            </a:r>
+            <a:endParaRPr lang="en-US" sz="1020" dirty="0"/>
+          </a:p>
+        </p:txBody>
+      </p:sp>
+      <p:sp>
+        <p:nvSpPr>
+          <p:cNvPr id="14" name="Text 12"/>
+          <p:cNvSpPr txBox="1"/>
+          <p:nvPr/>
+        </p:nvSpPr>
+        <p:spPr>
+          <a:xfrm>
+            <a:off x="8207289" y="4567977"/>
+            <a:ext cx="3633277" cy="178308"/>
+          </a:xfrm>
+          <a:prstGeom prst="rect">
+            <a:avLst/>
+          </a:prstGeom>
+          <a:noFill/>
+          <a:ln/>
+        </p:spPr>
+        <p:txBody>
+          <a:bodyPr wrap="none" lIns="0" tIns="0" rIns="0" bIns="0" rtlCol="0" anchor="t"/>
+          <a:lstStyle/>
+          <a:p>
+            <a:pPr algn="l" indent="0" marL="0">
+              <a:lnSpc>
+                <a:spcPts val="1404"/>
+              </a:lnSpc>
+              <a:buNone/>
+            </a:pPr>
+            <a:r>
+              <a:rPr lang="en-US" sz="936" spc="-54" kern="0" dirty="0">
+                <a:solidFill>
+                  <a:srgbClr val="BAE6FD"/>
+                </a:solidFill>
+                <a:latin typeface="Malgun Gothic" pitchFamily="34" charset="0"/>
+                <a:ea typeface="Malgun Gothic" pitchFamily="34" charset="-122"/>
+                <a:cs typeface="Malgun Gothic" pitchFamily="34" charset="-120"/>
+              </a:rPr>
+              <a:t>차수벽 자동 가동, 소방차 우선 신호 제어, 내비게이션 우회 전송</a:t>
+            </a:r>
+            <a:endParaRPr lang="en-US" sz="936" dirty="0"/>
+          </a:p>
+        </p:txBody>
+      </p:sp>
+      <p:sp>
+        <p:nvSpPr>
+          <p:cNvPr id="15" name="Text 13"/>
+          <p:cNvSpPr txBox="1"/>
+          <p:nvPr/>
+        </p:nvSpPr>
+        <p:spPr>
+          <a:xfrm>
+            <a:off x="-445038" y="6325453"/>
+            <a:ext cx="13082046" cy="164592"/>
+          </a:xfrm>
+          <a:prstGeom prst="rect">
+            <a:avLst/>
+          </a:prstGeom>
+          <a:noFill/>
+          <a:ln/>
+        </p:spPr>
+        <p:txBody>
+          <a:bodyPr wrap="none" lIns="0" tIns="0" rIns="0" bIns="0" rtlCol="0" anchor="t"/>
+          <a:lstStyle/>
+          <a:p>
+            <a:pPr algn="ctr" indent="0" marL="0">
+              <a:lnSpc>
+                <a:spcPts val="1296"/>
+              </a:lnSpc>
+              <a:buNone/>
+            </a:pPr>
+            <a:r>
+              <a:rPr lang="en-US" sz="864" spc="-54" kern="0" dirty="0">
+                <a:solidFill>
+                  <a:srgbClr val="7DD3FC"/>
+                </a:solidFill>
+                <a:latin typeface="Malgun Gothic" pitchFamily="34" charset="0"/>
+                <a:ea typeface="Malgun Gothic" pitchFamily="34" charset="-122"/>
+                <a:cs typeface="Malgun Gothic" pitchFamily="34" charset="-120"/>
+              </a:rPr>
+              <a:t>* 국토교통부 스마트시티 국가 전략 과제 (2024-2027)</a:t>
+            </a:r>
+            <a:endParaRPr lang="en-US" sz="864" dirty="0"/>
+          </a:p>
+        </p:txBody>
+      </p:sp>
     </p:spTree>
   </p:cSld>
   <p:clrMapOvr>
